--- a/AI_for_Finance_Course/Slides/Class_01_AI_Driven_Finance_Landscape.pptx
+++ b/AI_for_Finance_Course/Slides/Class_01_AI_Driven_Finance_Landscape.pptx
@@ -498,6 +498,10 @@
           </p:nvPr>
         </p:nvSpPr>
         <p:spPr/>
+        <p:txBody>
+          <a:bodyPr/>
+          <a:p/>
+        </p:txBody>
       </p:sp>
       <p:sp>
         <p:nvSpPr>
@@ -586,6 +590,10 @@
           </p:nvPr>
         </p:nvSpPr>
         <p:spPr/>
+        <p:txBody>
+          <a:bodyPr/>
+          <a:p/>
+        </p:txBody>
       </p:sp>
       <p:sp>
         <p:nvSpPr>
@@ -674,6 +682,10 @@
           </p:nvPr>
         </p:nvSpPr>
         <p:spPr/>
+        <p:txBody>
+          <a:bodyPr/>
+          <a:p/>
+        </p:txBody>
       </p:sp>
       <p:sp>
         <p:nvSpPr>
@@ -762,6 +774,10 @@
           </p:nvPr>
         </p:nvSpPr>
         <p:spPr/>
+        <p:txBody>
+          <a:bodyPr/>
+          <a:p/>
+        </p:txBody>
       </p:sp>
       <p:sp>
         <p:nvSpPr>
@@ -850,6 +866,10 @@
           </p:nvPr>
         </p:nvSpPr>
         <p:spPr/>
+        <p:txBody>
+          <a:bodyPr/>
+          <a:p/>
+        </p:txBody>
       </p:sp>
       <p:sp>
         <p:nvSpPr>
@@ -938,6 +958,10 @@
           </p:nvPr>
         </p:nvSpPr>
         <p:spPr/>
+        <p:txBody>
+          <a:bodyPr/>
+          <a:p/>
+        </p:txBody>
       </p:sp>
       <p:sp>
         <p:nvSpPr>
@@ -1026,6 +1050,10 @@
           </p:nvPr>
         </p:nvSpPr>
         <p:spPr/>
+        <p:txBody>
+          <a:bodyPr/>
+          <a:p/>
+        </p:txBody>
       </p:sp>
       <p:sp>
         <p:nvSpPr>
@@ -1114,6 +1142,10 @@
           </p:nvPr>
         </p:nvSpPr>
         <p:spPr/>
+        <p:txBody>
+          <a:bodyPr/>
+          <a:p/>
+        </p:txBody>
       </p:sp>
       <p:sp>
         <p:nvSpPr>
@@ -1202,6 +1234,10 @@
           </p:nvPr>
         </p:nvSpPr>
         <p:spPr/>
+        <p:txBody>
+          <a:bodyPr/>
+          <a:p/>
+        </p:txBody>
       </p:sp>
       <p:sp>
         <p:nvSpPr>
@@ -1290,6 +1326,10 @@
           </p:nvPr>
         </p:nvSpPr>
         <p:spPr/>
+        <p:txBody>
+          <a:bodyPr/>
+          <a:p/>
+        </p:txBody>
       </p:sp>
       <p:sp>
         <p:nvSpPr>
@@ -1378,6 +1418,10 @@
           </p:nvPr>
         </p:nvSpPr>
         <p:spPr/>
+        <p:txBody>
+          <a:bodyPr/>
+          <a:p/>
+        </p:txBody>
       </p:sp>
       <p:sp>
         <p:nvSpPr>
@@ -1466,6 +1510,10 @@
           </p:nvPr>
         </p:nvSpPr>
         <p:spPr/>
+        <p:txBody>
+          <a:bodyPr/>
+          <a:p/>
+        </p:txBody>
       </p:sp>
       <p:sp>
         <p:nvSpPr>
@@ -1554,6 +1602,10 @@
           </p:nvPr>
         </p:nvSpPr>
         <p:spPr/>
+        <p:txBody>
+          <a:bodyPr/>
+          <a:p/>
+        </p:txBody>
       </p:sp>
       <p:sp>
         <p:nvSpPr>
@@ -1642,6 +1694,10 @@
           </p:nvPr>
         </p:nvSpPr>
         <p:spPr/>
+        <p:txBody>
+          <a:bodyPr/>
+          <a:p/>
+        </p:txBody>
       </p:sp>
       <p:sp>
         <p:nvSpPr>
@@ -1730,6 +1786,10 @@
           </p:nvPr>
         </p:nvSpPr>
         <p:spPr/>
+        <p:txBody>
+          <a:bodyPr/>
+          <a:p/>
+        </p:txBody>
       </p:sp>
       <p:sp>
         <p:nvSpPr>
@@ -2367,6 +2427,10 @@
           </a:solidFill>
           <a:ln/>
         </p:spPr>
+        <p:txBody>
+          <a:bodyPr/>
+          <a:p/>
+        </p:txBody>
       </p:sp>
       <p:sp>
         <p:nvSpPr>
@@ -2895,6 +2959,10 @@
           </a:solidFill>
           <a:ln/>
         </p:spPr>
+        <p:txBody>
+          <a:bodyPr/>
+          <a:p/>
+        </p:txBody>
       </p:sp>
       <p:sp>
         <p:nvSpPr>
@@ -2993,6 +3061,10 @@
           </a:solidFill>
           <a:ln/>
         </p:spPr>
+        <p:txBody>
+          <a:bodyPr/>
+          <a:p/>
+        </p:txBody>
       </p:sp>
       <p:sp>
         <p:nvSpPr>
@@ -3130,6 +3202,10 @@
           </a:solidFill>
           <a:ln/>
         </p:spPr>
+        <p:txBody>
+          <a:bodyPr/>
+          <a:p/>
+        </p:txBody>
       </p:sp>
       <p:sp>
         <p:nvSpPr>
@@ -3267,6 +3343,10 @@
           </a:solidFill>
           <a:ln/>
         </p:spPr>
+        <p:txBody>
+          <a:bodyPr/>
+          <a:p/>
+        </p:txBody>
       </p:sp>
       <p:sp>
         <p:nvSpPr>
@@ -3404,6 +3484,10 @@
           </a:solidFill>
           <a:ln/>
         </p:spPr>
+        <p:txBody>
+          <a:bodyPr/>
+          <a:p/>
+        </p:txBody>
       </p:sp>
       <p:sp>
         <p:nvSpPr>
@@ -3573,6 +3657,10 @@
           </a:solidFill>
           <a:ln/>
         </p:spPr>
+        <p:txBody>
+          <a:bodyPr/>
+          <a:p/>
+        </p:txBody>
       </p:sp>
       <p:sp>
         <p:nvSpPr>
@@ -3671,6 +3759,10 @@
           </a:solidFill>
           <a:ln/>
         </p:spPr>
+        <p:txBody>
+          <a:bodyPr/>
+          <a:p/>
+        </p:txBody>
       </p:sp>
       <p:sp>
         <p:nvSpPr>
@@ -3810,6 +3902,10 @@
           </a:solidFill>
           <a:ln/>
         </p:spPr>
+        <p:txBody>
+          <a:bodyPr/>
+          <a:p/>
+        </p:txBody>
       </p:sp>
       <p:sp>
         <p:nvSpPr>
@@ -3949,6 +4045,10 @@
           </a:solidFill>
           <a:ln/>
         </p:spPr>
+        <p:txBody>
+          <a:bodyPr/>
+          <a:p/>
+        </p:txBody>
       </p:sp>
       <p:sp>
         <p:nvSpPr>
@@ -4120,6 +4220,10 @@
           </a:solidFill>
           <a:ln/>
         </p:spPr>
+        <p:txBody>
+          <a:bodyPr/>
+          <a:p/>
+        </p:txBody>
       </p:sp>
       <p:sp>
         <p:nvSpPr>
@@ -4218,6 +4322,10 @@
           </a:solidFill>
           <a:ln/>
         </p:spPr>
+        <p:txBody>
+          <a:bodyPr/>
+          <a:p/>
+        </p:txBody>
       </p:sp>
       <p:sp>
         <p:nvSpPr>
@@ -4355,6 +4463,10 @@
           </a:solidFill>
           <a:ln/>
         </p:spPr>
+        <p:txBody>
+          <a:bodyPr/>
+          <a:p/>
+        </p:txBody>
       </p:sp>
       <p:sp>
         <p:nvSpPr>
@@ -4492,6 +4604,10 @@
           </a:solidFill>
           <a:ln/>
         </p:spPr>
+        <p:txBody>
+          <a:bodyPr/>
+          <a:p/>
+        </p:txBody>
       </p:sp>
       <p:sp>
         <p:nvSpPr>
@@ -4661,6 +4777,10 @@
           </a:solidFill>
           <a:ln/>
         </p:spPr>
+        <p:txBody>
+          <a:bodyPr/>
+          <a:p/>
+        </p:txBody>
       </p:sp>
       <p:sp>
         <p:nvSpPr>
@@ -4764,6 +4884,10 @@
             <a:prstDash val="solid"/>
           </a:ln>
         </p:spPr>
+        <p:txBody>
+          <a:bodyPr/>
+          <a:p/>
+        </p:txBody>
       </p:sp>
       <p:sp>
         <p:nvSpPr>
@@ -4828,6 +4952,10 @@
             <a:prstDash val="solid"/>
           </a:ln>
         </p:spPr>
+        <p:txBody>
+          <a:bodyPr/>
+          <a:p/>
+        </p:txBody>
       </p:sp>
       <p:sp>
         <p:nvSpPr>
@@ -4892,6 +5020,10 @@
             <a:prstDash val="solid"/>
           </a:ln>
         </p:spPr>
+        <p:txBody>
+          <a:bodyPr/>
+          <a:p/>
+        </p:txBody>
       </p:sp>
       <p:sp>
         <p:nvSpPr>
@@ -4956,6 +5088,10 @@
             <a:prstDash val="solid"/>
           </a:ln>
         </p:spPr>
+        <p:txBody>
+          <a:bodyPr/>
+          <a:p/>
+        </p:txBody>
       </p:sp>
       <p:sp>
         <p:nvSpPr>
@@ -5020,6 +5156,10 @@
             <a:prstDash val="solid"/>
           </a:ln>
         </p:spPr>
+        <p:txBody>
+          <a:bodyPr/>
+          <a:p/>
+        </p:txBody>
       </p:sp>
       <p:sp>
         <p:nvSpPr>
@@ -5164,7 +5304,7 @@
                 <a:ea typeface="Calibri" pitchFamily="34" charset="-122"/>
                 <a:cs typeface="Calibri" pitchFamily="34" charset="-120"/>
               </a:rPr>
-              <a:t>www.proxiant.com</a:t>
+              <a:t>proxiant.ai</a:t>
             </a:r>
             <a:endParaRPr lang="en-US" sz="2800" dirty="0"/>
           </a:p>
@@ -5260,6 +5400,10 @@
           </a:solidFill>
           <a:ln/>
         </p:spPr>
+        <p:txBody>
+          <a:bodyPr/>
+          <a:p/>
+        </p:txBody>
       </p:sp>
       <p:sp>
         <p:nvSpPr>
@@ -5629,6 +5773,10 @@
           </a:solidFill>
           <a:ln/>
         </p:spPr>
+        <p:txBody>
+          <a:bodyPr/>
+          <a:p/>
+        </p:txBody>
       </p:sp>
       <p:sp>
         <p:nvSpPr>
@@ -5727,6 +5875,10 @@
           </a:solidFill>
           <a:ln/>
         </p:spPr>
+        <p:txBody>
+          <a:bodyPr/>
+          <a:p/>
+        </p:txBody>
       </p:sp>
       <p:sp>
         <p:nvSpPr>
@@ -5791,6 +5943,10 @@
             <a:prstDash val="solid"/>
           </a:ln>
         </p:spPr>
+        <p:txBody>
+          <a:bodyPr/>
+          <a:p/>
+        </p:txBody>
       </p:sp>
       <p:sp>
         <p:nvSpPr>
@@ -5855,6 +6011,10 @@
             <a:prstDash val="solid"/>
           </a:ln>
         </p:spPr>
+        <p:txBody>
+          <a:bodyPr/>
+          <a:p/>
+        </p:txBody>
       </p:sp>
       <p:sp>
         <p:nvSpPr>
@@ -5914,6 +6074,10 @@
           </a:solidFill>
           <a:ln/>
         </p:spPr>
+        <p:txBody>
+          <a:bodyPr/>
+          <a:p/>
+        </p:txBody>
       </p:sp>
       <p:sp>
         <p:nvSpPr>
@@ -5978,6 +6142,10 @@
             <a:prstDash val="solid"/>
           </a:ln>
         </p:spPr>
+        <p:txBody>
+          <a:bodyPr/>
+          <a:p/>
+        </p:txBody>
       </p:sp>
       <p:sp>
         <p:nvSpPr>
@@ -6042,6 +6210,10 @@
             <a:prstDash val="solid"/>
           </a:ln>
         </p:spPr>
+        <p:txBody>
+          <a:bodyPr/>
+          <a:p/>
+        </p:txBody>
       </p:sp>
       <p:sp>
         <p:nvSpPr>
@@ -6101,6 +6273,10 @@
           </a:solidFill>
           <a:ln/>
         </p:spPr>
+        <p:txBody>
+          <a:bodyPr/>
+          <a:p/>
+        </p:txBody>
       </p:sp>
       <p:sp>
         <p:nvSpPr>
@@ -6165,6 +6341,10 @@
             <a:prstDash val="solid"/>
           </a:ln>
         </p:spPr>
+        <p:txBody>
+          <a:bodyPr/>
+          <a:p/>
+        </p:txBody>
       </p:sp>
       <p:sp>
         <p:nvSpPr>
@@ -6229,6 +6409,10 @@
             <a:prstDash val="solid"/>
           </a:ln>
         </p:spPr>
+        <p:txBody>
+          <a:bodyPr/>
+          <a:p/>
+        </p:txBody>
       </p:sp>
       <p:sp>
         <p:nvSpPr>
@@ -6320,6 +6504,10 @@
           </a:solidFill>
           <a:ln/>
         </p:spPr>
+        <p:txBody>
+          <a:bodyPr/>
+          <a:p/>
+        </p:txBody>
       </p:sp>
       <p:sp>
         <p:nvSpPr>
@@ -6418,6 +6606,10 @@
           </a:solidFill>
           <a:ln/>
         </p:spPr>
+        <p:txBody>
+          <a:bodyPr/>
+          <a:p/>
+        </p:txBody>
       </p:sp>
       <p:sp>
         <p:nvSpPr>
@@ -6552,6 +6744,10 @@
           </a:solidFill>
           <a:ln/>
         </p:spPr>
+        <p:txBody>
+          <a:bodyPr/>
+          <a:p/>
+        </p:txBody>
       </p:sp>
       <p:sp>
         <p:nvSpPr>
@@ -6686,6 +6882,10 @@
           </a:solidFill>
           <a:ln/>
         </p:spPr>
+        <p:txBody>
+          <a:bodyPr/>
+          <a:p/>
+        </p:txBody>
       </p:sp>
       <p:sp>
         <p:nvSpPr>
@@ -6820,6 +7020,10 @@
           </a:solidFill>
           <a:ln/>
         </p:spPr>
+        <p:txBody>
+          <a:bodyPr/>
+          <a:p/>
+        </p:txBody>
       </p:sp>
       <p:sp>
         <p:nvSpPr>
@@ -6986,6 +7190,10 @@
           </a:solidFill>
           <a:ln/>
         </p:spPr>
+        <p:txBody>
+          <a:bodyPr/>
+          <a:p/>
+        </p:txBody>
       </p:sp>
       <p:sp>
         <p:nvSpPr>
@@ -7084,6 +7292,10 @@
           </a:solidFill>
           <a:ln/>
         </p:spPr>
+        <p:txBody>
+          <a:bodyPr/>
+          <a:p/>
+        </p:txBody>
       </p:sp>
       <p:sp>
         <p:nvSpPr>
@@ -7263,6 +7475,10 @@
           </a:solidFill>
           <a:ln/>
         </p:spPr>
+        <p:txBody>
+          <a:bodyPr/>
+          <a:p/>
+        </p:txBody>
       </p:sp>
       <p:sp>
         <p:nvSpPr>
@@ -7442,6 +7658,10 @@
           </a:solidFill>
           <a:ln/>
         </p:spPr>
+        <p:txBody>
+          <a:bodyPr/>
+          <a:p/>
+        </p:txBody>
       </p:sp>
       <p:sp>
         <p:nvSpPr>
@@ -7653,6 +7873,10 @@
           </a:solidFill>
           <a:ln/>
         </p:spPr>
+        <p:txBody>
+          <a:bodyPr/>
+          <a:p/>
+        </p:txBody>
       </p:sp>
       <p:sp>
         <p:nvSpPr>
@@ -7756,6 +7980,10 @@
             <a:prstDash val="solid"/>
           </a:ln>
         </p:spPr>
+        <p:txBody>
+          <a:bodyPr/>
+          <a:p/>
+        </p:txBody>
       </p:sp>
       <p:sp>
         <p:nvSpPr>
@@ -7859,6 +8087,10 @@
             <a:prstDash val="solid"/>
           </a:ln>
         </p:spPr>
+        <p:txBody>
+          <a:bodyPr/>
+          <a:p/>
+        </p:txBody>
       </p:sp>
       <p:sp>
         <p:nvSpPr>
@@ -7962,6 +8194,10 @@
             <a:prstDash val="solid"/>
           </a:ln>
         </p:spPr>
+        <p:txBody>
+          <a:bodyPr/>
+          <a:p/>
+        </p:txBody>
       </p:sp>
       <p:sp>
         <p:nvSpPr>
@@ -8170,6 +8406,10 @@
           </a:solidFill>
           <a:ln/>
         </p:spPr>
+        <p:txBody>
+          <a:bodyPr/>
+          <a:p/>
+        </p:txBody>
       </p:sp>
       <p:sp>
         <p:nvSpPr>
@@ -8268,6 +8508,10 @@
           </a:solidFill>
           <a:ln/>
         </p:spPr>
+        <p:txBody>
+          <a:bodyPr/>
+          <a:p/>
+        </p:txBody>
       </p:sp>
       <p:sp>
         <p:nvSpPr>
@@ -8366,6 +8610,10 @@
           </a:solidFill>
           <a:ln/>
         </p:spPr>
+        <p:txBody>
+          <a:bodyPr/>
+          <a:p/>
+        </p:txBody>
       </p:sp>
       <p:sp>
         <p:nvSpPr>
@@ -8464,6 +8712,10 @@
           </a:solidFill>
           <a:ln/>
         </p:spPr>
+        <p:txBody>
+          <a:bodyPr/>
+          <a:p/>
+        </p:txBody>
       </p:sp>
       <p:sp>
         <p:nvSpPr>
@@ -8594,6 +8846,10 @@
           </a:solidFill>
           <a:ln/>
         </p:spPr>
+        <p:txBody>
+          <a:bodyPr/>
+          <a:p/>
+        </p:txBody>
       </p:sp>
       <p:sp>
         <p:nvSpPr>
@@ -8692,6 +8948,10 @@
           </a:solidFill>
           <a:ln/>
         </p:spPr>
+        <p:txBody>
+          <a:bodyPr/>
+          <a:p/>
+        </p:txBody>
       </p:sp>
       <p:sp>
         <p:nvSpPr>
@@ -8751,6 +9011,10 @@
           </a:solidFill>
           <a:ln/>
         </p:spPr>
+        <p:txBody>
+          <a:bodyPr/>
+          <a:p/>
+        </p:txBody>
       </p:sp>
       <p:sp>
         <p:nvSpPr>
@@ -8810,6 +9074,10 @@
           </a:solidFill>
           <a:ln/>
         </p:spPr>
+        <p:txBody>
+          <a:bodyPr/>
+          <a:p/>
+        </p:txBody>
       </p:sp>
       <p:sp>
         <p:nvSpPr>
@@ -8869,6 +9137,10 @@
           </a:solidFill>
           <a:ln/>
         </p:spPr>
+        <p:txBody>
+          <a:bodyPr/>
+          <a:p/>
+        </p:txBody>
       </p:sp>
       <p:sp>
         <p:nvSpPr>
@@ -8928,6 +9200,10 @@
           </a:solidFill>
           <a:ln/>
         </p:spPr>
+        <p:txBody>
+          <a:bodyPr/>
+          <a:p/>
+        </p:txBody>
       </p:sp>
       <p:sp>
         <p:nvSpPr>
@@ -9019,6 +9295,10 @@
           </a:solidFill>
           <a:ln/>
         </p:spPr>
+        <p:txBody>
+          <a:bodyPr/>
+          <a:p/>
+        </p:txBody>
       </p:sp>
       <p:sp>
         <p:nvSpPr>
@@ -9117,6 +9397,10 @@
           </a:solidFill>
           <a:ln/>
         </p:spPr>
+        <p:txBody>
+          <a:bodyPr/>
+          <a:p/>
+        </p:txBody>
       </p:sp>
       <p:sp>
         <p:nvSpPr>
@@ -9215,6 +9499,10 @@
           </a:solidFill>
           <a:ln/>
         </p:spPr>
+        <p:txBody>
+          <a:bodyPr/>
+          <a:p/>
+        </p:txBody>
       </p:sp>
       <p:sp>
         <p:nvSpPr>
@@ -9313,6 +9601,10 @@
           </a:solidFill>
           <a:ln/>
         </p:spPr>
+        <p:txBody>
+          <a:bodyPr/>
+          <a:p/>
+        </p:txBody>
       </p:sp>
       <p:sp>
         <p:nvSpPr>
@@ -9411,6 +9703,10 @@
           </a:solidFill>
           <a:ln/>
         </p:spPr>
+        <p:txBody>
+          <a:bodyPr/>
+          <a:p/>
+        </p:txBody>
       </p:sp>
       <p:sp>
         <p:nvSpPr>
